--- a/Presentation/Week 1 Mini Project.pptx
+++ b/Presentation/Week 1 Mini Project.pptx
@@ -127,12 +127,20 @@
 </p:presentation>
 </file>
 
+<file path=ppt/revisionInfo.xml><?xml version="1.0" encoding="utf-8"?>
+<p1510:revInfo xmlns:a="http://schemas.openxmlformats.org/drawingml/2006/main" xmlns:r="http://schemas.openxmlformats.org/officeDocument/2006/relationships" xmlns:p1510="http://schemas.microsoft.com/office/powerpoint/2015/10/main">
+  <p1510:revLst>
+    <p1510:client id="{8604534B-8652-4E4B-845C-0DB6DE981D02}" v="6" dt="2026-10-12T20:04:46.783"/>
+  </p1510:revLst>
+</p1510:revInfo>
+</file>
+
 <file path=ppt/changesInfos/changesInfo1.xml><?xml version="1.0" encoding="utf-8"?>
 <pc:chgInfo xmlns:a="http://schemas.openxmlformats.org/drawingml/2006/main" xmlns:r="http://schemas.openxmlformats.org/officeDocument/2006/relationships" xmlns:ac="http://schemas.microsoft.com/office/drawing/2013/main/command" xmlns:pc="http://schemas.microsoft.com/office/powerpoint/2013/main/command">
   <pc:docChgLst>
     <pc:chgData name="Akinlolu Oyetakin" userId="fa5cef570f93ac02" providerId="LiveId" clId="{78872068-8B10-4F26-BF97-C82E0CEFE7C4}"/>
-    <pc:docChg chg="modSld">
-      <pc:chgData name="Akinlolu Oyetakin" userId="fa5cef570f93ac02" providerId="LiveId" clId="{78872068-8B10-4F26-BF97-C82E0CEFE7C4}" dt="2026-10-12T09:57:38.225" v="4" actId="20577"/>
+    <pc:docChg chg="undo custSel modSld">
+      <pc:chgData name="Akinlolu Oyetakin" userId="fa5cef570f93ac02" providerId="LiveId" clId="{78872068-8B10-4F26-BF97-C82E0CEFE7C4}" dt="2026-10-12T20:04:56.113" v="529" actId="1076"/>
       <pc:docMkLst>
         <pc:docMk/>
       </pc:docMkLst>
@@ -152,7 +160,7 @@
         </pc:spChg>
       </pc:sldChg>
       <pc:sldChg chg="modSp mod">
-        <pc:chgData name="Akinlolu Oyetakin" userId="fa5cef570f93ac02" providerId="LiveId" clId="{78872068-8B10-4F26-BF97-C82E0CEFE7C4}" dt="2026-10-12T09:57:38.225" v="4" actId="20577"/>
+        <pc:chgData name="Akinlolu Oyetakin" userId="fa5cef570f93ac02" providerId="LiveId" clId="{78872068-8B10-4F26-BF97-C82E0CEFE7C4}" dt="2026-10-12T19:31:17.630" v="163" actId="33524"/>
         <pc:sldMkLst>
           <pc:docMk/>
           <pc:sldMk cId="0" sldId="258"/>
@@ -163,6 +171,204 @@
             <pc:docMk/>
             <pc:sldMk cId="0" sldId="258"/>
             <ac:spMk id="11" creationId="{00000000-0000-0000-0000-000000000000}"/>
+          </ac:spMkLst>
+        </pc:spChg>
+        <pc:spChg chg="mod">
+          <ac:chgData name="Akinlolu Oyetakin" userId="fa5cef570f93ac02" providerId="LiveId" clId="{78872068-8B10-4F26-BF97-C82E0CEFE7C4}" dt="2026-10-12T19:31:17.630" v="163" actId="33524"/>
+          <ac:spMkLst>
+            <pc:docMk/>
+            <pc:sldMk cId="0" sldId="258"/>
+            <ac:spMk id="19" creationId="{00000000-0000-0000-0000-000000000000}"/>
+          </ac:spMkLst>
+        </pc:spChg>
+      </pc:sldChg>
+      <pc:sldChg chg="delSp modSp mod">
+        <pc:chgData name="Akinlolu Oyetakin" userId="fa5cef570f93ac02" providerId="LiveId" clId="{78872068-8B10-4F26-BF97-C82E0CEFE7C4}" dt="2026-10-12T19:55:19.651" v="475" actId="1076"/>
+        <pc:sldMkLst>
+          <pc:docMk/>
+          <pc:sldMk cId="0" sldId="259"/>
+        </pc:sldMkLst>
+        <pc:spChg chg="mod">
+          <ac:chgData name="Akinlolu Oyetakin" userId="fa5cef570f93ac02" providerId="LiveId" clId="{78872068-8B10-4F26-BF97-C82E0CEFE7C4}" dt="2026-10-12T19:33:09.320" v="185" actId="20577"/>
+          <ac:spMkLst>
+            <pc:docMk/>
+            <pc:sldMk cId="0" sldId="259"/>
+            <ac:spMk id="7" creationId="{00000000-0000-0000-0000-000000000000}"/>
+          </ac:spMkLst>
+        </pc:spChg>
+        <pc:spChg chg="mod">
+          <ac:chgData name="Akinlolu Oyetakin" userId="fa5cef570f93ac02" providerId="LiveId" clId="{78872068-8B10-4F26-BF97-C82E0CEFE7C4}" dt="2026-10-12T19:54:21.625" v="433" actId="1076"/>
+          <ac:spMkLst>
+            <pc:docMk/>
+            <pc:sldMk cId="0" sldId="259"/>
+            <ac:spMk id="10" creationId="{00000000-0000-0000-0000-000000000000}"/>
+          </ac:spMkLst>
+        </pc:spChg>
+        <pc:spChg chg="mod">
+          <ac:chgData name="Akinlolu Oyetakin" userId="fa5cef570f93ac02" providerId="LiveId" clId="{78872068-8B10-4F26-BF97-C82E0CEFE7C4}" dt="2026-10-12T19:55:19.651" v="475" actId="1076"/>
+          <ac:spMkLst>
+            <pc:docMk/>
+            <pc:sldMk cId="0" sldId="259"/>
+            <ac:spMk id="11" creationId="{00000000-0000-0000-0000-000000000000}"/>
+          </ac:spMkLst>
+        </pc:spChg>
+        <pc:spChg chg="del mod">
+          <ac:chgData name="Akinlolu Oyetakin" userId="fa5cef570f93ac02" providerId="LiveId" clId="{78872068-8B10-4F26-BF97-C82E0CEFE7C4}" dt="2026-10-12T19:55:13.120" v="474" actId="478"/>
+          <ac:spMkLst>
+            <pc:docMk/>
+            <pc:sldMk cId="0" sldId="259"/>
+            <ac:spMk id="12" creationId="{00000000-0000-0000-0000-000000000000}"/>
+          </ac:spMkLst>
+        </pc:spChg>
+        <pc:spChg chg="del">
+          <ac:chgData name="Akinlolu Oyetakin" userId="fa5cef570f93ac02" providerId="LiveId" clId="{78872068-8B10-4F26-BF97-C82E0CEFE7C4}" dt="2026-10-12T19:54:12.621" v="431" actId="478"/>
+          <ac:spMkLst>
+            <pc:docMk/>
+            <pc:sldMk cId="0" sldId="259"/>
+            <ac:spMk id="13" creationId="{00000000-0000-0000-0000-000000000000}"/>
+          </ac:spMkLst>
+        </pc:spChg>
+        <pc:spChg chg="del">
+          <ac:chgData name="Akinlolu Oyetakin" userId="fa5cef570f93ac02" providerId="LiveId" clId="{78872068-8B10-4F26-BF97-C82E0CEFE7C4}" dt="2026-10-12T19:54:16.631" v="432" actId="478"/>
+          <ac:spMkLst>
+            <pc:docMk/>
+            <pc:sldMk cId="0" sldId="259"/>
+            <ac:spMk id="14" creationId="{00000000-0000-0000-0000-000000000000}"/>
+          </ac:spMkLst>
+        </pc:spChg>
+        <pc:graphicFrameChg chg="mod modGraphic">
+          <ac:chgData name="Akinlolu Oyetakin" userId="fa5cef570f93ac02" providerId="LiveId" clId="{78872068-8B10-4F26-BF97-C82E0CEFE7C4}" dt="2026-10-12T19:53:14.326" v="430" actId="20577"/>
+          <ac:graphicFrameMkLst>
+            <pc:docMk/>
+            <pc:sldMk cId="0" sldId="259"/>
+            <ac:graphicFrameMk id="9" creationId="{00000000-0000-0000-0000-000000000000}"/>
+          </ac:graphicFrameMkLst>
+        </pc:graphicFrameChg>
+      </pc:sldChg>
+      <pc:sldChg chg="delSp modSp mod">
+        <pc:chgData name="Akinlolu Oyetakin" userId="fa5cef570f93ac02" providerId="LiveId" clId="{78872068-8B10-4F26-BF97-C82E0CEFE7C4}" dt="2026-10-12T20:04:56.113" v="529" actId="1076"/>
+        <pc:sldMkLst>
+          <pc:docMk/>
+          <pc:sldMk cId="0" sldId="260"/>
+        </pc:sldMkLst>
+        <pc:spChg chg="mod">
+          <ac:chgData name="Akinlolu Oyetakin" userId="fa5cef570f93ac02" providerId="LiveId" clId="{78872068-8B10-4F26-BF97-C82E0CEFE7C4}" dt="2026-10-12T19:59:58.443" v="496" actId="1076"/>
+          <ac:spMkLst>
+            <pc:docMk/>
+            <pc:sldMk cId="0" sldId="260"/>
+            <ac:spMk id="5" creationId="{00000000-0000-0000-0000-000000000000}"/>
+          </ac:spMkLst>
+        </pc:spChg>
+        <pc:spChg chg="mod">
+          <ac:chgData name="Akinlolu Oyetakin" userId="fa5cef570f93ac02" providerId="LiveId" clId="{78872068-8B10-4F26-BF97-C82E0CEFE7C4}" dt="2026-10-12T20:00:09.061" v="498" actId="1076"/>
+          <ac:spMkLst>
+            <pc:docMk/>
+            <pc:sldMk cId="0" sldId="260"/>
+            <ac:spMk id="6" creationId="{00000000-0000-0000-0000-000000000000}"/>
+          </ac:spMkLst>
+        </pc:spChg>
+        <pc:spChg chg="mod">
+          <ac:chgData name="Akinlolu Oyetakin" userId="fa5cef570f93ac02" providerId="LiveId" clId="{78872068-8B10-4F26-BF97-C82E0CEFE7C4}" dt="2026-10-12T20:00:18.931" v="500" actId="1076"/>
+          <ac:spMkLst>
+            <pc:docMk/>
+            <pc:sldMk cId="0" sldId="260"/>
+            <ac:spMk id="7" creationId="{00000000-0000-0000-0000-000000000000}"/>
+          </ac:spMkLst>
+        </pc:spChg>
+        <pc:spChg chg="del">
+          <ac:chgData name="Akinlolu Oyetakin" userId="fa5cef570f93ac02" providerId="LiveId" clId="{78872068-8B10-4F26-BF97-C82E0CEFE7C4}" dt="2026-10-12T19:57:27.975" v="476" actId="478"/>
+          <ac:spMkLst>
+            <pc:docMk/>
+            <pc:sldMk cId="0" sldId="260"/>
+            <ac:spMk id="8" creationId="{00000000-0000-0000-0000-000000000000}"/>
+          </ac:spMkLst>
+        </pc:spChg>
+        <pc:spChg chg="mod">
+          <ac:chgData name="Akinlolu Oyetakin" userId="fa5cef570f93ac02" providerId="LiveId" clId="{78872068-8B10-4F26-BF97-C82E0CEFE7C4}" dt="2026-10-12T20:00:14.825" v="499" actId="1076"/>
+          <ac:spMkLst>
+            <pc:docMk/>
+            <pc:sldMk cId="0" sldId="260"/>
+            <ac:spMk id="9" creationId="{00000000-0000-0000-0000-000000000000}"/>
+          </ac:spMkLst>
+        </pc:spChg>
+        <pc:spChg chg="del">
+          <ac:chgData name="Akinlolu Oyetakin" userId="fa5cef570f93ac02" providerId="LiveId" clId="{78872068-8B10-4F26-BF97-C82E0CEFE7C4}" dt="2026-10-12T20:02:26.263" v="501" actId="478"/>
+          <ac:spMkLst>
+            <pc:docMk/>
+            <pc:sldMk cId="0" sldId="260"/>
+            <ac:spMk id="13" creationId="{00000000-0000-0000-0000-000000000000}"/>
+          </ac:spMkLst>
+        </pc:spChg>
+        <pc:spChg chg="mod">
+          <ac:chgData name="Akinlolu Oyetakin" userId="fa5cef570f93ac02" providerId="LiveId" clId="{78872068-8B10-4F26-BF97-C82E0CEFE7C4}" dt="2026-10-12T20:04:11.251" v="522" actId="1076"/>
+          <ac:spMkLst>
+            <pc:docMk/>
+            <pc:sldMk cId="0" sldId="260"/>
+            <ac:spMk id="14" creationId="{00000000-0000-0000-0000-000000000000}"/>
+          </ac:spMkLst>
+        </pc:spChg>
+        <pc:spChg chg="del">
+          <ac:chgData name="Akinlolu Oyetakin" userId="fa5cef570f93ac02" providerId="LiveId" clId="{78872068-8B10-4F26-BF97-C82E0CEFE7C4}" dt="2026-10-12T20:03:01.944" v="506" actId="478"/>
+          <ac:spMkLst>
+            <pc:docMk/>
+            <pc:sldMk cId="0" sldId="260"/>
+            <ac:spMk id="17" creationId="{00000000-0000-0000-0000-000000000000}"/>
+          </ac:spMkLst>
+        </pc:spChg>
+        <pc:spChg chg="mod">
+          <ac:chgData name="Akinlolu Oyetakin" userId="fa5cef570f93ac02" providerId="LiveId" clId="{78872068-8B10-4F26-BF97-C82E0CEFE7C4}" dt="2026-10-12T20:03:27.487" v="513" actId="404"/>
+          <ac:spMkLst>
+            <pc:docMk/>
+            <pc:sldMk cId="0" sldId="260"/>
+            <ac:spMk id="18" creationId="{00000000-0000-0000-0000-000000000000}"/>
+          </ac:spMkLst>
+        </pc:spChg>
+        <pc:spChg chg="del">
+          <ac:chgData name="Akinlolu Oyetakin" userId="fa5cef570f93ac02" providerId="LiveId" clId="{78872068-8B10-4F26-BF97-C82E0CEFE7C4}" dt="2026-10-12T20:03:34.951" v="515" actId="478"/>
+          <ac:spMkLst>
+            <pc:docMk/>
+            <pc:sldMk cId="0" sldId="260"/>
+            <ac:spMk id="21" creationId="{00000000-0000-0000-0000-000000000000}"/>
+          </ac:spMkLst>
+        </pc:spChg>
+        <pc:spChg chg="mod">
+          <ac:chgData name="Akinlolu Oyetakin" userId="fa5cef570f93ac02" providerId="LiveId" clId="{78872068-8B10-4F26-BF97-C82E0CEFE7C4}" dt="2026-10-12T20:03:55.253" v="519" actId="403"/>
+          <ac:spMkLst>
+            <pc:docMk/>
+            <pc:sldMk cId="0" sldId="260"/>
+            <ac:spMk id="22" creationId="{00000000-0000-0000-0000-000000000000}"/>
+          </ac:spMkLst>
+        </pc:spChg>
+        <pc:spChg chg="del">
+          <ac:chgData name="Akinlolu Oyetakin" userId="fa5cef570f93ac02" providerId="LiveId" clId="{78872068-8B10-4F26-BF97-C82E0CEFE7C4}" dt="2026-10-12T20:03:58.905" v="520" actId="478"/>
+          <ac:spMkLst>
+            <pc:docMk/>
+            <pc:sldMk cId="0" sldId="260"/>
+            <ac:spMk id="25" creationId="{00000000-0000-0000-0000-000000000000}"/>
+          </ac:spMkLst>
+        </pc:spChg>
+        <pc:spChg chg="mod">
+          <ac:chgData name="Akinlolu Oyetakin" userId="fa5cef570f93ac02" providerId="LiveId" clId="{78872068-8B10-4F26-BF97-C82E0CEFE7C4}" dt="2026-10-12T20:04:30.131" v="525" actId="403"/>
+          <ac:spMkLst>
+            <pc:docMk/>
+            <pc:sldMk cId="0" sldId="260"/>
+            <ac:spMk id="26" creationId="{00000000-0000-0000-0000-000000000000}"/>
+          </ac:spMkLst>
+        </pc:spChg>
+        <pc:spChg chg="mod">
+          <ac:chgData name="Akinlolu Oyetakin" userId="fa5cef570f93ac02" providerId="LiveId" clId="{78872068-8B10-4F26-BF97-C82E0CEFE7C4}" dt="2026-10-12T20:04:56.113" v="529" actId="1076"/>
+          <ac:spMkLst>
+            <pc:docMk/>
+            <pc:sldMk cId="0" sldId="260"/>
+            <ac:spMk id="28" creationId="{00000000-0000-0000-0000-000000000000}"/>
+          </ac:spMkLst>
+        </pc:spChg>
+        <pc:spChg chg="del">
+          <ac:chgData name="Akinlolu Oyetakin" userId="fa5cef570f93ac02" providerId="LiveId" clId="{78872068-8B10-4F26-BF97-C82E0CEFE7C4}" dt="2026-10-12T19:58:42.628" v="484" actId="478"/>
+          <ac:spMkLst>
+            <pc:docMk/>
+            <pc:sldMk cId="0" sldId="260"/>
+            <ac:spMk id="29" creationId="{00000000-0000-0000-0000-000000000000}"/>
           </ac:spMkLst>
         </pc:spChg>
       </pc:sldChg>
@@ -350,7 +556,7 @@
           <a:p>
             <a:fld id="{5BCAD085-E8A6-8845-BD4E-CB4CCA059FC4}" type="datetimeFigureOut">
               <a:rPr lang="en-US" smtClean="0"/>
-              <a:t>10/11/2026</a:t>
+              <a:t>10/12/2026</a:t>
             </a:fld>
             <a:endParaRPr lang="en-US"/>
           </a:p>
@@ -518,7 +724,7 @@
           <a:p>
             <a:fld id="{5BCAD085-E8A6-8845-BD4E-CB4CCA059FC4}" type="datetimeFigureOut">
               <a:rPr lang="en-US" smtClean="0"/>
-              <a:t>10/11/2026</a:t>
+              <a:t>10/12/2026</a:t>
             </a:fld>
             <a:endParaRPr lang="en-US"/>
           </a:p>
@@ -696,7 +902,7 @@
           <a:p>
             <a:fld id="{5BCAD085-E8A6-8845-BD4E-CB4CCA059FC4}" type="datetimeFigureOut">
               <a:rPr lang="en-US" smtClean="0"/>
-              <a:t>10/11/2026</a:t>
+              <a:t>10/12/2026</a:t>
             </a:fld>
             <a:endParaRPr lang="en-US"/>
           </a:p>
@@ -864,7 +1070,7 @@
           <a:p>
             <a:fld id="{5BCAD085-E8A6-8845-BD4E-CB4CCA059FC4}" type="datetimeFigureOut">
               <a:rPr lang="en-US" smtClean="0"/>
-              <a:t>10/11/2026</a:t>
+              <a:t>10/12/2026</a:t>
             </a:fld>
             <a:endParaRPr lang="en-US"/>
           </a:p>
@@ -1109,7 +1315,7 @@
           <a:p>
             <a:fld id="{5BCAD085-E8A6-8845-BD4E-CB4CCA059FC4}" type="datetimeFigureOut">
               <a:rPr lang="en-US" smtClean="0"/>
-              <a:t>10/11/2026</a:t>
+              <a:t>10/12/2026</a:t>
             </a:fld>
             <a:endParaRPr lang="en-US"/>
           </a:p>
@@ -1394,7 +1600,7 @@
           <a:p>
             <a:fld id="{5BCAD085-E8A6-8845-BD4E-CB4CCA059FC4}" type="datetimeFigureOut">
               <a:rPr lang="en-US" smtClean="0"/>
-              <a:t>10/11/2026</a:t>
+              <a:t>10/12/2026</a:t>
             </a:fld>
             <a:endParaRPr lang="en-US"/>
           </a:p>
@@ -1813,7 +2019,7 @@
           <a:p>
             <a:fld id="{5BCAD085-E8A6-8845-BD4E-CB4CCA059FC4}" type="datetimeFigureOut">
               <a:rPr lang="en-US" smtClean="0"/>
-              <a:t>10/11/2026</a:t>
+              <a:t>10/12/2026</a:t>
             </a:fld>
             <a:endParaRPr lang="en-US"/>
           </a:p>
@@ -1930,7 +2136,7 @@
           <a:p>
             <a:fld id="{5BCAD085-E8A6-8845-BD4E-CB4CCA059FC4}" type="datetimeFigureOut">
               <a:rPr lang="en-US" smtClean="0"/>
-              <a:t>10/11/2026</a:t>
+              <a:t>10/12/2026</a:t>
             </a:fld>
             <a:endParaRPr lang="en-US"/>
           </a:p>
@@ -2025,7 +2231,7 @@
           <a:p>
             <a:fld id="{5BCAD085-E8A6-8845-BD4E-CB4CCA059FC4}" type="datetimeFigureOut">
               <a:rPr lang="en-US" smtClean="0"/>
-              <a:t>10/11/2026</a:t>
+              <a:t>10/12/2026</a:t>
             </a:fld>
             <a:endParaRPr lang="en-US"/>
           </a:p>
@@ -2300,7 +2506,7 @@
           <a:p>
             <a:fld id="{5BCAD085-E8A6-8845-BD4E-CB4CCA059FC4}" type="datetimeFigureOut">
               <a:rPr lang="en-US" smtClean="0"/>
-              <a:t>10/11/2026</a:t>
+              <a:t>10/12/2026</a:t>
             </a:fld>
             <a:endParaRPr lang="en-US"/>
           </a:p>
@@ -2552,7 +2758,7 @@
           <a:p>
             <a:fld id="{5BCAD085-E8A6-8845-BD4E-CB4CCA059FC4}" type="datetimeFigureOut">
               <a:rPr lang="en-US" smtClean="0"/>
-              <a:t>10/11/2026</a:t>
+              <a:t>10/12/2026</a:t>
             </a:fld>
             <a:endParaRPr lang="en-US"/>
           </a:p>
@@ -2763,7 +2969,7 @@
           <a:p>
             <a:fld id="{5BCAD085-E8A6-8845-BD4E-CB4CCA059FC4}" type="datetimeFigureOut">
               <a:rPr lang="en-US" smtClean="0"/>
-              <a:t>10/11/2026</a:t>
+              <a:t>10/12/2026</a:t>
             </a:fld>
             <a:endParaRPr lang="en-US"/>
           </a:p>
@@ -5448,7 +5654,7 @@
         <p:spPr>
           <a:xfrm>
             <a:off x="685800" y="3566160"/>
-            <a:ext cx="5394960" cy="1344984"/>
+            <a:ext cx="5394960" cy="437043"/>
           </a:xfrm>
           <a:prstGeom prst="rect">
             <a:avLst/>
@@ -5467,7 +5673,7 @@
               </a:spcAft>
             </a:pPr>
             <a:r>
-              <a:rPr sz="1300" b="1" dirty="0">
+              <a:rPr lang="en-US" sz="1300" b="1" dirty="0">
                 <a:solidFill>
                   <a:srgbClr val="009999"/>
                 </a:solidFill>
@@ -5476,234 +5682,23 @@
               <a:t>• </a:t>
             </a:r>
             <a:r>
-              <a:rPr sz="1300" b="1" dirty="0">
+              <a:rPr lang="en-US" sz="1300" b="1" dirty="0">
                 <a:solidFill>
                   <a:srgbClr val="2C3849"/>
                 </a:solidFill>
                 <a:latin typeface="Aptos"/>
               </a:rPr>
-              <a:t>Contract — </a:t>
-            </a:r>
-            <a:r>
-              <a:rPr sz="1300" dirty="0">
+              <a:t>ALL — </a:t>
+            </a:r>
+            <a:r>
+              <a:rPr lang="en-US" sz="1300" dirty="0">
                 <a:solidFill>
                   <a:srgbClr val="2C3849"/>
                 </a:solidFill>
                 <a:latin typeface="Aptos"/>
               </a:rPr>
-              <a:t>strongest categorical association</a:t>
-            </a:r>
-            <a:r>
-              <a:rPr lang="en-GB" sz="1300" dirty="0">
-                <a:solidFill>
-                  <a:srgbClr val="2C3849"/>
-                </a:solidFill>
-                <a:latin typeface="Aptos"/>
-              </a:rPr>
-              <a:t> with 42.71% churn rate</a:t>
-            </a:r>
-            <a:endParaRPr sz="1300" dirty="0">
-              <a:solidFill>
-                <a:srgbClr val="2C3849"/>
-              </a:solidFill>
-              <a:latin typeface="Aptos"/>
-            </a:endParaRPr>
-          </a:p>
-          <a:p>
-            <a:pPr>
-              <a:spcAft>
-                <a:spcPts val="600"/>
-              </a:spcAft>
-            </a:pPr>
-            <a:r>
-              <a:rPr sz="1300" b="1" dirty="0">
-                <a:solidFill>
-                  <a:srgbClr val="009999"/>
-                </a:solidFill>
-                <a:latin typeface="Aptos"/>
-              </a:rPr>
-              <a:t>• </a:t>
-            </a:r>
-            <a:r>
-              <a:rPr sz="1300" b="1" dirty="0">
-                <a:solidFill>
-                  <a:srgbClr val="2C3849"/>
-                </a:solidFill>
-                <a:latin typeface="Aptos"/>
-              </a:rPr>
-              <a:t>Online Security — </a:t>
-            </a:r>
-            <a:r>
-              <a:rPr sz="1300" dirty="0">
-                <a:solidFill>
-                  <a:srgbClr val="2C3849"/>
-                </a:solidFill>
-                <a:latin typeface="Aptos"/>
-              </a:rPr>
-              <a:t>service-related churn signal</a:t>
-            </a:r>
-            <a:r>
-              <a:rPr lang="en-GB" sz="1300" dirty="0">
-                <a:solidFill>
-                  <a:srgbClr val="2C3849"/>
-                </a:solidFill>
-                <a:latin typeface="Aptos"/>
-              </a:rPr>
-              <a:t> with 41.46% churn rate</a:t>
-            </a:r>
-            <a:endParaRPr sz="1300" dirty="0">
-              <a:solidFill>
-                <a:srgbClr val="2C3849"/>
-              </a:solidFill>
-              <a:latin typeface="Aptos"/>
-            </a:endParaRPr>
-          </a:p>
-          <a:p>
-            <a:pPr>
-              <a:spcAft>
-                <a:spcPts val="600"/>
-              </a:spcAft>
-            </a:pPr>
-            <a:r>
-              <a:rPr sz="1300" b="1" dirty="0">
-                <a:solidFill>
-                  <a:srgbClr val="009999"/>
-                </a:solidFill>
-                <a:latin typeface="Aptos"/>
-              </a:rPr>
-              <a:t>• </a:t>
-            </a:r>
-            <a:r>
-              <a:rPr sz="1300" b="1" dirty="0">
-                <a:solidFill>
-                  <a:srgbClr val="2C3849"/>
-                </a:solidFill>
-                <a:latin typeface="Aptos"/>
-              </a:rPr>
-              <a:t>Tech Support — </a:t>
-            </a:r>
-            <a:r>
-              <a:rPr sz="1300" dirty="0">
-                <a:solidFill>
-                  <a:srgbClr val="2C3849"/>
-                </a:solidFill>
-                <a:latin typeface="Aptos"/>
-              </a:rPr>
-              <a:t>service-related churn signal</a:t>
-            </a:r>
-            <a:r>
-              <a:rPr lang="en-GB" sz="1300" dirty="0">
-                <a:solidFill>
-                  <a:srgbClr val="2C3849"/>
-                </a:solidFill>
-                <a:latin typeface="Aptos"/>
-              </a:rPr>
-              <a:t> with 41.63% churn rate</a:t>
-            </a:r>
-            <a:endParaRPr sz="1300" dirty="0">
-              <a:solidFill>
-                <a:srgbClr val="2C3849"/>
-              </a:solidFill>
-              <a:latin typeface="Aptos"/>
-            </a:endParaRPr>
-          </a:p>
-          <a:p>
-            <a:pPr>
-              <a:spcAft>
-                <a:spcPts val="600"/>
-              </a:spcAft>
-            </a:pPr>
-            <a:r>
-              <a:rPr sz="1300" b="1" dirty="0">
-                <a:solidFill>
-                  <a:srgbClr val="009999"/>
-                </a:solidFill>
-                <a:latin typeface="Aptos"/>
-              </a:rPr>
-              <a:t>• </a:t>
-            </a:r>
-            <a:r>
-              <a:rPr sz="1300" b="1" dirty="0">
-                <a:solidFill>
-                  <a:srgbClr val="2C3849"/>
-                </a:solidFill>
-                <a:latin typeface="Aptos"/>
-              </a:rPr>
-              <a:t>Internet Service — </a:t>
-            </a:r>
-            <a:r>
-              <a:rPr sz="1300" dirty="0">
-                <a:solidFill>
-                  <a:srgbClr val="2C3849"/>
-                </a:solidFill>
-                <a:latin typeface="Aptos"/>
-              </a:rPr>
-              <a:t>service type</a:t>
-            </a:r>
-            <a:r>
-              <a:rPr lang="en-GB" sz="1300" dirty="0">
-                <a:solidFill>
-                  <a:srgbClr val="2C3849"/>
-                </a:solidFill>
-                <a:latin typeface="Aptos"/>
-              </a:rPr>
-              <a:t> with 41.89% churn rate</a:t>
-            </a:r>
-            <a:endParaRPr sz="1300" dirty="0">
-              <a:solidFill>
-                <a:srgbClr val="2C3849"/>
-              </a:solidFill>
-              <a:latin typeface="Aptos"/>
-            </a:endParaRPr>
-          </a:p>
-          <a:p>
-            <a:pPr>
-              <a:spcAft>
-                <a:spcPts val="600"/>
-              </a:spcAft>
-            </a:pPr>
-            <a:r>
-              <a:rPr sz="1300" b="1" dirty="0">
-                <a:solidFill>
-                  <a:srgbClr val="009999"/>
-                </a:solidFill>
-                <a:latin typeface="Aptos"/>
-              </a:rPr>
-              <a:t>• </a:t>
-            </a:r>
-            <a:r>
-              <a:rPr sz="1300" b="1" dirty="0">
-                <a:solidFill>
-                  <a:srgbClr val="2C3849"/>
-                </a:solidFill>
-                <a:latin typeface="Aptos"/>
-              </a:rPr>
-              <a:t>Payment Method — </a:t>
-            </a:r>
-            <a:r>
-              <a:rPr sz="1300" dirty="0">
-                <a:solidFill>
-                  <a:srgbClr val="2C3849"/>
-                </a:solidFill>
-                <a:latin typeface="Aptos"/>
-              </a:rPr>
-              <a:t>billing behavior</a:t>
-            </a:r>
-            <a:r>
-              <a:rPr lang="en-GB" sz="1300" dirty="0">
-                <a:solidFill>
-                  <a:srgbClr val="2C3849"/>
-                </a:solidFill>
-                <a:latin typeface="Aptos"/>
-              </a:rPr>
-              <a:t> with 45.28% churn rate </a:t>
-            </a:r>
-            <a:endParaRPr sz="1300" dirty="0">
-              <a:solidFill>
-                <a:srgbClr val="2C3849"/>
-              </a:solidFill>
-              <a:latin typeface="Aptos"/>
-            </a:endParaRPr>
+              <a:t>Categorical Columns were converted into numerical and was encoded. The numerical Columns was standardized </a:t>
+            </a:r>
           </a:p>
         </p:txBody>
       </p:sp>
@@ -6459,7 +6454,7 @@
                 </a:solidFill>
                 <a:latin typeface="Aptos"/>
               </a:rPr>
-              <a:t>e and</a:t>
+              <a:t>e ,</a:t>
             </a:r>
             <a:r>
               <a:rPr sz="1200" dirty="0">
@@ -6468,8 +6463,23 @@
                 </a:solidFill>
                 <a:latin typeface="Aptos"/>
               </a:rPr>
-              <a:t> Random Forest</a:t>
-            </a:r>
+              <a:t>Random Forest</a:t>
+            </a:r>
+            <a:r>
+              <a:rPr lang="en-US" sz="1200" dirty="0">
+                <a:solidFill>
+                  <a:srgbClr val="2C3849"/>
+                </a:solidFill>
+                <a:latin typeface="Aptos"/>
+              </a:rPr>
+              <a:t> and KNN</a:t>
+            </a:r>
+            <a:endParaRPr sz="1200" dirty="0">
+              <a:solidFill>
+                <a:srgbClr val="2C3849"/>
+              </a:solidFill>
+              <a:latin typeface="Aptos"/>
+            </a:endParaRPr>
           </a:p>
           <a:p>
             <a:pPr>
@@ -6502,8 +6512,41 @@
                 </a:solidFill>
                 <a:latin typeface="Aptos"/>
               </a:rPr>
-              <a:t>same train/test split; accuracy, precision, recall, F1 and ROC-AUC.</a:t>
-            </a:r>
+              <a:t>same train/test split; accuracy, precision, recall, F1</a:t>
+            </a:r>
+            <a:r>
+              <a:rPr lang="en-US" sz="1200" dirty="0">
+                <a:solidFill>
+                  <a:srgbClr val="2C3849"/>
+                </a:solidFill>
+                <a:latin typeface="Aptos"/>
+              </a:rPr>
+              <a:t>, </a:t>
+            </a:r>
+            <a:r>
+              <a:rPr sz="1200" dirty="0">
+                <a:solidFill>
+                  <a:srgbClr val="2C3849"/>
+                </a:solidFill>
+                <a:latin typeface="Aptos"/>
+              </a:rPr>
+              <a:t>ROC-AUC</a:t>
+            </a:r>
+            <a:r>
+              <a:rPr lang="en-US" sz="1200" dirty="0">
+                <a:solidFill>
+                  <a:srgbClr val="2C3849"/>
+                </a:solidFill>
+                <a:latin typeface="Aptos"/>
+              </a:rPr>
+              <a:t> and </a:t>
+            </a:r>
+            <a:endParaRPr sz="1200" dirty="0">
+              <a:solidFill>
+                <a:srgbClr val="2C3849"/>
+              </a:solidFill>
+              <a:latin typeface="Aptos"/>
+            </a:endParaRPr>
           </a:p>
           <a:p>
             <a:pPr>
@@ -6598,14 +6641,14 @@
           <p:nvPr>
             <p:extLst>
               <p:ext uri="{D42A27DB-BD31-4B8C-83A1-F6EECF244321}">
-                <p14:modId xmlns:p14="http://schemas.microsoft.com/office/powerpoint/2010/main" val="1318722480"/>
+                <p14:modId xmlns:p14="http://schemas.microsoft.com/office/powerpoint/2010/main" val="1484412140"/>
               </p:ext>
             </p:extLst>
           </p:nvPr>
         </p:nvGraphicFramePr>
         <p:xfrm>
           <a:off x="5054600" y="1785366"/>
-          <a:ext cx="6327648" cy="2240280"/>
+          <a:ext cx="6327649" cy="2240280"/>
         </p:xfrm>
         <a:graphic>
           <a:graphicData uri="http://schemas.openxmlformats.org/drawingml/2006/table">
@@ -6635,7 +6678,7 @@
                     </a:ext>
                   </a:extLst>
                 </a:gridCol>
-                <a:gridCol w="914400">
+                <a:gridCol w="914401">
                   <a:extLst>
                     <a:ext uri="{9D8B030D-6E8A-4147-A177-3AD203B41FA5}">
                       <a16:colId xmlns:a16="http://schemas.microsoft.com/office/drawing/2014/main" val="20003"/>
@@ -6665,7 +6708,7 @@
                     <a:p>
                       <a:pPr algn="l"/>
                       <a:r>
-                        <a:rPr sz="900" b="1">
+                        <a:rPr sz="900" b="1" dirty="0">
                           <a:solidFill>
                             <a:srgbClr val="FFFFFF"/>
                           </a:solidFill>
@@ -6688,7 +6731,7 @@
                     <a:p>
                       <a:pPr algn="ctr"/>
                       <a:r>
-                        <a:rPr sz="900" b="1">
+                        <a:rPr sz="900" b="1" dirty="0">
                           <a:solidFill>
                             <a:srgbClr val="FFFFFF"/>
                           </a:solidFill>
@@ -6780,7 +6823,7 @@
                     <a:p>
                       <a:pPr algn="ctr"/>
                       <a:r>
-                        <a:rPr sz="900" b="1">
+                        <a:rPr sz="900" b="1" dirty="0">
                           <a:solidFill>
                             <a:srgbClr val="FFFFFF"/>
                           </a:solidFill>
@@ -6810,7 +6853,7 @@
                     <a:p>
                       <a:pPr algn="l"/>
                       <a:r>
-                        <a:rPr sz="1000" b="0">
+                        <a:rPr sz="1000" b="0" dirty="0">
                           <a:solidFill>
                             <a:srgbClr val="2C3849"/>
                           </a:solidFill>
@@ -6833,13 +6876,22 @@
                     <a:p>
                       <a:pPr algn="ctr"/>
                       <a:r>
-                        <a:rPr sz="1000" b="0">
+                        <a:rPr lang="en-US" sz="1000" b="0" dirty="0">
                           <a:solidFill>
                             <a:srgbClr val="2C3849"/>
                           </a:solidFill>
                           <a:latin typeface="Aptos"/>
                         </a:rPr>
-                        <a:t>76.9%</a:t>
+                        <a:t>71.7</a:t>
+                      </a:r>
+                      <a:r>
+                        <a:rPr sz="1000" b="0" dirty="0">
+                          <a:solidFill>
+                            <a:srgbClr val="2C3849"/>
+                          </a:solidFill>
+                          <a:latin typeface="Aptos"/>
+                        </a:rPr>
+                        <a:t>%</a:t>
                       </a:r>
                     </a:p>
                   </a:txBody>
@@ -6856,13 +6908,22 @@
                     <a:p>
                       <a:pPr algn="ctr"/>
                       <a:r>
-                        <a:rPr sz="1000" b="0">
+                        <a:rPr lang="en-US" sz="1000" b="0" dirty="0">
                           <a:solidFill>
                             <a:srgbClr val="2C3849"/>
                           </a:solidFill>
                           <a:latin typeface="Aptos"/>
                         </a:rPr>
-                        <a:t>60.5%</a:t>
+                        <a:t>46.8</a:t>
+                      </a:r>
+                      <a:r>
+                        <a:rPr sz="1000" b="0" dirty="0">
+                          <a:solidFill>
+                            <a:srgbClr val="2C3849"/>
+                          </a:solidFill>
+                          <a:latin typeface="Aptos"/>
+                        </a:rPr>
+                        <a:t>%</a:t>
                       </a:r>
                     </a:p>
                   </a:txBody>
@@ -6879,13 +6940,22 @@
                     <a:p>
                       <a:pPr algn="ctr"/>
                       <a:r>
-                        <a:rPr sz="1000" b="0">
+                        <a:rPr lang="en-US" sz="1000" b="0" dirty="0">
                           <a:solidFill>
                             <a:srgbClr val="2C3849"/>
                           </a:solidFill>
                           <a:latin typeface="Aptos"/>
                         </a:rPr>
-                        <a:t>36.9%</a:t>
+                        <a:t>48.1</a:t>
+                      </a:r>
+                      <a:r>
+                        <a:rPr sz="1000" b="0" dirty="0">
+                          <a:solidFill>
+                            <a:srgbClr val="2C3849"/>
+                          </a:solidFill>
+                          <a:latin typeface="Aptos"/>
+                        </a:rPr>
+                        <a:t>%</a:t>
                       </a:r>
                     </a:p>
                   </a:txBody>
@@ -6902,14 +6972,20 @@
                     <a:p>
                       <a:pPr algn="ctr"/>
                       <a:r>
-                        <a:rPr sz="1000" b="0">
+                        <a:rPr lang="en-US" sz="1000" b="0" dirty="0">
                           <a:solidFill>
                             <a:srgbClr val="2C3849"/>
                           </a:solidFill>
                           <a:latin typeface="Aptos"/>
                         </a:rPr>
-                        <a:t>0.458</a:t>
+                        <a:t>47.4%</a:t>
                       </a:r>
+                      <a:endParaRPr sz="1000" b="0" dirty="0">
+                        <a:solidFill>
+                          <a:srgbClr val="2C3849"/>
+                        </a:solidFill>
+                        <a:latin typeface="Aptos"/>
+                      </a:endParaRPr>
                     </a:p>
                   </a:txBody>
                   <a:tcPr marL="54864" marR="36576" marT="27432" marB="18288" anchor="ctr">
@@ -6925,14 +7001,20 @@
                     <a:p>
                       <a:pPr algn="ctr"/>
                       <a:r>
-                        <a:rPr sz="1000" b="0">
+                        <a:rPr lang="en-US" sz="1000" b="0" dirty="0">
                           <a:solidFill>
                             <a:srgbClr val="2C3849"/>
                           </a:solidFill>
                           <a:latin typeface="Aptos"/>
                         </a:rPr>
-                        <a:t>0.810</a:t>
+                        <a:t>64.1%</a:t>
                       </a:r>
+                      <a:endParaRPr sz="1000" b="0" dirty="0">
+                        <a:solidFill>
+                          <a:srgbClr val="2C3849"/>
+                        </a:solidFill>
+                        <a:latin typeface="Aptos"/>
+                      </a:endParaRPr>
                     </a:p>
                   </a:txBody>
                   <a:tcPr marL="54864" marR="36576" marT="27432" marB="18288" anchor="ctr">
@@ -6977,7 +7059,7 @@
                           </a:solidFill>
                           <a:latin typeface="Aptos"/>
                         </a:rPr>
-                        <a:t>Logistic Reg.</a:t>
+                        <a:t>K-Nearest Neighbours</a:t>
                       </a:r>
                     </a:p>
                     <a:p>
@@ -7073,7 +7155,7 @@
                           </a:solidFill>
                           <a:latin typeface="Aptos"/>
                         </a:rPr>
-                        <a:t>58.4%</a:t>
+                        <a:t>55.3%</a:t>
                       </a:r>
                     </a:p>
                     <a:p>
@@ -7121,7 +7203,7 @@
                           </a:solidFill>
                           <a:latin typeface="Aptos"/>
                         </a:rPr>
-                        <a:t>39.0%</a:t>
+                        <a:t>57.5%</a:t>
                       </a:r>
                     </a:p>
                     <a:p>
@@ -7169,7 +7251,7 @@
                           </a:solidFill>
                           <a:latin typeface="Aptos"/>
                         </a:rPr>
-                        <a:t>0.468</a:t>
+                        <a:t>56.4%</a:t>
                       </a:r>
                     </a:p>
                     <a:p>
@@ -7217,7 +7299,7 @@
                           </a:solidFill>
                           <a:latin typeface="Aptos"/>
                         </a:rPr>
-                        <a:t>0.813</a:t>
+                        <a:t>79%</a:t>
                       </a:r>
                     </a:p>
                     <a:p>
@@ -7249,6 +7331,15 @@
                     <a:lstStyle/>
                     <a:p>
                       <a:pPr algn="l"/>
+                      <a:r>
+                        <a:rPr lang="en-US" sz="1000" b="0" dirty="0">
+                          <a:solidFill>
+                            <a:srgbClr val="2C3849"/>
+                          </a:solidFill>
+                          <a:latin typeface="Aptos"/>
+                        </a:rPr>
+                        <a:t>Random Forest</a:t>
+                      </a:r>
                       <a:endParaRPr lang="en-GB" sz="1000" b="0" dirty="0">
                         <a:solidFill>
                           <a:srgbClr val="2C3849"/>
@@ -7269,6 +7360,15 @@
                     <a:lstStyle/>
                     <a:p>
                       <a:pPr algn="ctr"/>
+                      <a:r>
+                        <a:rPr lang="en-US" sz="1000" b="0" dirty="0">
+                          <a:solidFill>
+                            <a:srgbClr val="2C3849"/>
+                          </a:solidFill>
+                          <a:latin typeface="Aptos"/>
+                        </a:rPr>
+                        <a:t>78.1%</a:t>
+                      </a:r>
                       <a:endParaRPr lang="en-GB" sz="1000" b="0" dirty="0">
                         <a:solidFill>
                           <a:srgbClr val="2C3849"/>
@@ -7289,6 +7389,15 @@
                     <a:lstStyle/>
                     <a:p>
                       <a:pPr algn="ctr"/>
+                      <a:r>
+                        <a:rPr lang="en-US" sz="1000" b="0" dirty="0">
+                          <a:solidFill>
+                            <a:srgbClr val="2C3849"/>
+                          </a:solidFill>
+                          <a:latin typeface="Aptos"/>
+                        </a:rPr>
+                        <a:t>61.10%</a:t>
+                      </a:r>
                       <a:endParaRPr sz="1000" b="0" dirty="0">
                         <a:solidFill>
                           <a:srgbClr val="2C3849"/>
@@ -7309,6 +7418,15 @@
                     <a:lstStyle/>
                     <a:p>
                       <a:pPr algn="ctr"/>
+                      <a:r>
+                        <a:rPr lang="en-US" sz="1000" b="0" dirty="0">
+                          <a:solidFill>
+                            <a:srgbClr val="2C3849"/>
+                          </a:solidFill>
+                          <a:latin typeface="Aptos"/>
+                        </a:rPr>
+                        <a:t>48.1%</a:t>
+                      </a:r>
                       <a:endParaRPr sz="1000" b="0" dirty="0">
                         <a:solidFill>
                           <a:srgbClr val="2C3849"/>
@@ -7329,6 +7447,15 @@
                     <a:lstStyle/>
                     <a:p>
                       <a:pPr algn="ctr"/>
+                      <a:r>
+                        <a:rPr lang="en-US" sz="1000" b="0" dirty="0">
+                          <a:solidFill>
+                            <a:srgbClr val="2C3849"/>
+                          </a:solidFill>
+                          <a:latin typeface="Aptos"/>
+                        </a:rPr>
+                        <a:t>53.8%</a:t>
+                      </a:r>
                       <a:endParaRPr sz="1000" b="0" dirty="0">
                         <a:solidFill>
                           <a:srgbClr val="2C3849"/>
@@ -7349,6 +7476,15 @@
                     <a:lstStyle/>
                     <a:p>
                       <a:pPr algn="ctr"/>
+                      <a:r>
+                        <a:rPr lang="en-US" sz="1000" b="0" dirty="0">
+                          <a:solidFill>
+                            <a:srgbClr val="2C3849"/>
+                          </a:solidFill>
+                          <a:latin typeface="Aptos"/>
+                        </a:rPr>
+                        <a:t>81.80%</a:t>
+                      </a:r>
                       <a:endParaRPr sz="1000" b="0" dirty="0">
                         <a:solidFill>
                           <a:srgbClr val="2C3849"/>
@@ -7377,13 +7513,51 @@
                     <a:p>
                       <a:pPr algn="l"/>
                       <a:r>
-                        <a:rPr sz="1000" b="1">
+                        <a:rPr lang="en-US" sz="1000" b="1" dirty="0">
                           <a:solidFill>
                             <a:srgbClr val="13233D"/>
                           </a:solidFill>
                           <a:latin typeface="Aptos"/>
                         </a:rPr>
-                        <a:t>Random Forest</a:t>
+                        <a:t>Logistic Regression</a:t>
+                      </a:r>
+                      <a:endParaRPr sz="1000" b="1" dirty="0">
+                        <a:solidFill>
+                          <a:srgbClr val="13233D"/>
+                        </a:solidFill>
+                        <a:latin typeface="Aptos"/>
+                      </a:endParaRPr>
+                    </a:p>
+                  </a:txBody>
+                  <a:tcPr marL="54864" marR="36576" marT="27432" marB="18288" anchor="ctr">
+                    <a:solidFill>
+                      <a:srgbClr val="D7F4EE"/>
+                    </a:solidFill>
+                  </a:tcPr>
+                </a:tc>
+                <a:tc>
+                  <a:txBody>
+                    <a:bodyPr/>
+                    <a:lstStyle/>
+                    <a:p>
+                      <a:pPr algn="ctr"/>
+                      <a:r>
+                        <a:rPr lang="en-US" sz="1000" b="1" dirty="0">
+                          <a:solidFill>
+                            <a:srgbClr val="13233D"/>
+                          </a:solidFill>
+                          <a:latin typeface="Aptos"/>
+                        </a:rPr>
+                        <a:t>80.6</a:t>
+                      </a:r>
+                      <a:r>
+                        <a:rPr sz="1000" b="1" dirty="0">
+                          <a:solidFill>
+                            <a:srgbClr val="13233D"/>
+                          </a:solidFill>
+                          <a:latin typeface="Aptos"/>
+                        </a:rPr>
+                        <a:t>%</a:t>
                       </a:r>
                     </a:p>
                   </a:txBody>
@@ -7400,13 +7574,22 @@
                     <a:p>
                       <a:pPr algn="ctr"/>
                       <a:r>
-                        <a:rPr sz="1000" b="1">
+                        <a:rPr lang="en-US" sz="1000" b="1" dirty="0">
                           <a:solidFill>
                             <a:srgbClr val="13233D"/>
                           </a:solidFill>
                           <a:latin typeface="Aptos"/>
                         </a:rPr>
-                        <a:t>77.4%</a:t>
+                        <a:t>65.7</a:t>
+                      </a:r>
+                      <a:r>
+                        <a:rPr sz="1000" b="1" dirty="0">
+                          <a:solidFill>
+                            <a:srgbClr val="13233D"/>
+                          </a:solidFill>
+                          <a:latin typeface="Aptos"/>
+                        </a:rPr>
+                        <a:t>%</a:t>
                       </a:r>
                     </a:p>
                   </a:txBody>
@@ -7423,13 +7606,22 @@
                     <a:p>
                       <a:pPr algn="ctr"/>
                       <a:r>
-                        <a:rPr sz="1000" b="1">
+                        <a:rPr lang="en-US" sz="1000" b="1" dirty="0">
                           <a:solidFill>
                             <a:srgbClr val="13233D"/>
                           </a:solidFill>
                           <a:latin typeface="Aptos"/>
                         </a:rPr>
-                        <a:t>60.1%</a:t>
+                        <a:t>55.9</a:t>
+                      </a:r>
+                      <a:r>
+                        <a:rPr sz="1000" b="1" dirty="0">
+                          <a:solidFill>
+                            <a:srgbClr val="13233D"/>
+                          </a:solidFill>
+                          <a:latin typeface="Aptos"/>
+                        </a:rPr>
+                        <a:t>%</a:t>
                       </a:r>
                     </a:p>
                   </a:txBody>
@@ -7446,14 +7638,20 @@
                     <a:p>
                       <a:pPr algn="ctr"/>
                       <a:r>
-                        <a:rPr sz="1000" b="1">
+                        <a:rPr lang="en-US" sz="1000" b="1" dirty="0">
                           <a:solidFill>
                             <a:srgbClr val="13233D"/>
                           </a:solidFill>
                           <a:latin typeface="Aptos"/>
                         </a:rPr>
-                        <a:t>43.9%</a:t>
+                        <a:t>60.4</a:t>
                       </a:r>
+                      <a:endParaRPr sz="1000" b="1" dirty="0">
+                        <a:solidFill>
+                          <a:srgbClr val="13233D"/>
+                        </a:solidFill>
+                        <a:latin typeface="Aptos"/>
+                      </a:endParaRPr>
                     </a:p>
                   </a:txBody>
                   <a:tcPr marL="54864" marR="36576" marT="27432" marB="18288" anchor="ctr">
@@ -7469,37 +7667,20 @@
                     <a:p>
                       <a:pPr algn="ctr"/>
                       <a:r>
-                        <a:rPr sz="1000" b="1">
+                        <a:rPr lang="en-US" sz="1000" b="1" dirty="0">
                           <a:solidFill>
                             <a:srgbClr val="13233D"/>
                           </a:solidFill>
                           <a:latin typeface="Aptos"/>
                         </a:rPr>
-                        <a:t>0.507</a:t>
+                        <a:t>84.2</a:t>
                       </a:r>
-                    </a:p>
-                  </a:txBody>
-                  <a:tcPr marL="54864" marR="36576" marT="27432" marB="18288" anchor="ctr">
-                    <a:solidFill>
-                      <a:srgbClr val="D7F4EE"/>
-                    </a:solidFill>
-                  </a:tcPr>
-                </a:tc>
-                <a:tc>
-                  <a:txBody>
-                    <a:bodyPr/>
-                    <a:lstStyle/>
-                    <a:p>
-                      <a:pPr algn="ctr"/>
-                      <a:r>
-                        <a:rPr sz="1000" b="1" dirty="0">
-                          <a:solidFill>
-                            <a:srgbClr val="13233D"/>
-                          </a:solidFill>
-                          <a:latin typeface="Aptos"/>
-                        </a:rPr>
-                        <a:t>0.808</a:t>
-                      </a:r>
+                      <a:endParaRPr sz="1000" b="1" dirty="0">
+                        <a:solidFill>
+                          <a:srgbClr val="13233D"/>
+                        </a:solidFill>
+                        <a:latin typeface="Aptos"/>
+                      </a:endParaRPr>
                     </a:p>
                   </a:txBody>
                   <a:tcPr marL="54864" marR="36576" marT="27432" marB="18288" anchor="ctr">
@@ -7526,7 +7707,7 @@
         </p:nvSpPr>
         <p:spPr>
           <a:xfrm>
-            <a:off x="4572000" y="4279392"/>
+            <a:off x="658368" y="5068157"/>
             <a:ext cx="6903720" cy="1051560"/>
           </a:xfrm>
           <a:prstGeom prst="roundRect">
@@ -7572,7 +7753,7 @@
         </p:nvSpPr>
         <p:spPr>
           <a:xfrm>
-            <a:off x="4800600" y="4453128"/>
+            <a:off x="1303020" y="5461254"/>
             <a:ext cx="6355080" cy="320088"/>
           </a:xfrm>
           <a:prstGeom prst="rect">
@@ -7616,125 +7797,23 @@
                 </a:solidFill>
                 <a:latin typeface="Aptos"/>
               </a:rPr>
-              <a:t>: Random Forest</a:t>
-            </a:r>
-          </a:p>
-        </p:txBody>
-      </p:sp>
-      <p:sp>
-        <p:nvSpPr>
-          <p:cNvPr id="12" name="TextBox 11"/>
-          <p:cNvSpPr txBox="1"/>
-          <p:nvPr/>
-        </p:nvSpPr>
-        <p:spPr>
-          <a:xfrm>
-            <a:off x="4800600" y="4773168"/>
-            <a:ext cx="6309360" cy="310896"/>
-          </a:xfrm>
-          <a:prstGeom prst="rect">
-            <a:avLst/>
-          </a:prstGeom>
-          <a:noFill/>
-        </p:spPr>
-        <p:txBody>
-          <a:bodyPr wrap="square" lIns="36576" tIns="36576" rIns="36576" bIns="36576" anchor="t">
-            <a:spAutoFit/>
-          </a:bodyPr>
-          <a:lstStyle/>
-          <a:p>
-            <a:pPr algn="l">
-              <a:spcAft>
-                <a:spcPts val="0"/>
-              </a:spcAft>
-            </a:pPr>
-            <a:r>
-              <a:rPr sz="1100" b="0" i="0">
-                <a:solidFill>
-                  <a:srgbClr val="2C3849"/>
-                </a:solidFill>
-                <a:latin typeface="Aptos"/>
-              </a:rPr>
-              <a:t>Best test accuracy, recall and F1 in the prior comparison; Logistic Regression had the best ROC-AUC.</a:t>
-            </a:r>
-          </a:p>
-        </p:txBody>
-      </p:sp>
-      <p:sp>
-        <p:nvSpPr>
-          <p:cNvPr id="13" name="TextBox 12"/>
-          <p:cNvSpPr txBox="1"/>
-          <p:nvPr/>
-        </p:nvSpPr>
-        <p:spPr>
-          <a:xfrm>
-            <a:off x="658368" y="4480560"/>
-            <a:ext cx="3291840" cy="274320"/>
-          </a:xfrm>
-          <a:prstGeom prst="rect">
-            <a:avLst/>
-          </a:prstGeom>
-          <a:noFill/>
-        </p:spPr>
-        <p:txBody>
-          <a:bodyPr wrap="square" lIns="36576" tIns="36576" rIns="36576" bIns="36576" anchor="t">
-            <a:spAutoFit/>
-          </a:bodyPr>
-          <a:lstStyle/>
-          <a:p>
-            <a:pPr algn="l">
-              <a:spcAft>
-                <a:spcPts val="0"/>
-              </a:spcAft>
-            </a:pPr>
-            <a:r>
-              <a:rPr sz="1500" b="1" i="0">
+              <a:t>: </a:t>
+            </a:r>
+            <a:r>
+              <a:rPr lang="en-US" sz="1600" b="1" dirty="0">
                 <a:solidFill>
                   <a:srgbClr val="13233D"/>
                 </a:solidFill>
                 <a:latin typeface="Aptos"/>
               </a:rPr>
-              <a:t>Business interpretation</a:t>
-            </a:r>
-          </a:p>
-        </p:txBody>
-      </p:sp>
-      <p:sp>
-        <p:nvSpPr>
-          <p:cNvPr id="14" name="TextBox 13"/>
-          <p:cNvSpPr txBox="1"/>
-          <p:nvPr/>
-        </p:nvSpPr>
-        <p:spPr>
-          <a:xfrm>
-            <a:off x="658368" y="4864608"/>
-            <a:ext cx="3703320" cy="914400"/>
-          </a:xfrm>
-          <a:prstGeom prst="rect">
-            <a:avLst/>
-          </a:prstGeom>
-          <a:noFill/>
-        </p:spPr>
-        <p:txBody>
-          <a:bodyPr wrap="square" lIns="36576" tIns="36576" rIns="36576" bIns="36576" anchor="t">
-            <a:spAutoFit/>
-          </a:bodyPr>
-          <a:lstStyle/>
-          <a:p>
-            <a:pPr algn="l">
-              <a:spcAft>
-                <a:spcPts val="0"/>
-              </a:spcAft>
-            </a:pPr>
-            <a:r>
-              <a:rPr sz="1200" b="0" i="0">
-                <a:solidFill>
-                  <a:srgbClr val="2C3849"/>
-                </a:solidFill>
-                <a:latin typeface="Aptos"/>
-              </a:rPr>
-              <a:t>Recall of 43.9% means the model identified fewer than half of actual churners at the default threshold. Precision of 60.1% means some flagged customers will not churn.</a:t>
-            </a:r>
+              <a:t>Logistic Regression</a:t>
+            </a:r>
+            <a:endParaRPr sz="1600" b="1" i="0" dirty="0">
+              <a:solidFill>
+                <a:srgbClr val="13233D"/>
+              </a:solidFill>
+              <a:latin typeface="Aptos"/>
+            </a:endParaRPr>
           </a:p>
         </p:txBody>
       </p:sp>
@@ -7838,7 +7917,7 @@
               </a:spcAft>
             </a:pPr>
             <a:r>
-              <a:rPr sz="2600" b="1" i="0">
+              <a:rPr sz="2600" b="1" i="0" dirty="0">
                 <a:solidFill>
                   <a:srgbClr val="13233D"/>
                 </a:solidFill>
@@ -7903,7 +7982,7 @@
         </p:nvSpPr>
         <p:spPr>
           <a:xfrm>
-            <a:off x="594360" y="6519672"/>
+            <a:off x="320040" y="6629061"/>
             <a:ext cx="7772400" cy="164592"/>
           </a:xfrm>
           <a:prstGeom prst="rect">
@@ -7942,8 +8021,8 @@
         </p:nvSpPr>
         <p:spPr>
           <a:xfrm>
-            <a:off x="658368" y="1508760"/>
-            <a:ext cx="4983480" cy="4389120"/>
+            <a:off x="133435" y="1386332"/>
+            <a:ext cx="4983480" cy="5242729"/>
           </a:xfrm>
           <a:prstGeom prst="roundRect">
             <a:avLst/>
@@ -7988,7 +8067,7 @@
         </p:nvSpPr>
         <p:spPr>
           <a:xfrm>
-            <a:off x="960120" y="1810512"/>
+            <a:off x="819235" y="1392022"/>
             <a:ext cx="4297680" cy="365760"/>
           </a:xfrm>
           <a:prstGeom prst="rect">
@@ -8008,7 +8087,7 @@
               </a:spcAft>
             </a:pPr>
             <a:r>
-              <a:rPr sz="2000" b="1" i="0">
+              <a:rPr sz="2000" b="1" i="0" dirty="0">
                 <a:solidFill>
                   <a:srgbClr val="FFFFFF"/>
                 </a:solidFill>
@@ -8021,14 +8100,14 @@
       </p:sp>
       <p:sp>
         <p:nvSpPr>
-          <p:cNvPr id="8" name="TextBox 7"/>
+          <p:cNvPr id="9" name="TextBox 8"/>
           <p:cNvSpPr txBox="1"/>
           <p:nvPr/>
         </p:nvSpPr>
         <p:spPr>
           <a:xfrm>
-            <a:off x="960120" y="2331720"/>
-            <a:ext cx="4251960" cy="914400"/>
+            <a:off x="640080" y="1808750"/>
+            <a:ext cx="4251960" cy="4776692"/>
           </a:xfrm>
           <a:prstGeom prst="rect">
             <a:avLst/>
@@ -8036,194 +8115,108 @@
           <a:noFill/>
         </p:spPr>
         <p:txBody>
-          <a:bodyPr wrap="square" lIns="36576" tIns="36576" rIns="36576" bIns="36576" anchor="t">
-            <a:spAutoFit/>
-          </a:bodyPr>
-          <a:lstStyle/>
-          <a:p>
-            <a:pPr algn="l">
-              <a:spcAft>
-                <a:spcPts val="0"/>
-              </a:spcAft>
-            </a:pPr>
-            <a:r>
-              <a:rPr sz="1800" b="1" i="0" dirty="0">
-                <a:solidFill>
-                  <a:srgbClr val="D7F4EE"/>
-                </a:solidFill>
-                <a:latin typeface="Aptos"/>
-              </a:rPr>
-              <a:t>Use Random Forest as the leading candidate for further validation</a:t>
-            </a:r>
-            <a:r>
-              <a:rPr lang="en-US" sz="1800" b="1" i="0" dirty="0">
-                <a:solidFill>
-                  <a:srgbClr val="D7F4EE"/>
-                </a:solidFill>
-                <a:latin typeface="Aptos"/>
-              </a:rPr>
-              <a:t> but </a:t>
-            </a:r>
-            <a:r>
-              <a:rPr sz="1800" b="1" i="0" dirty="0">
-                <a:solidFill>
-                  <a:srgbClr val="D7F4EE"/>
-                </a:solidFill>
-                <a:latin typeface="Aptos"/>
-              </a:rPr>
-              <a:t>not as an automatic decision-maker.</a:t>
-            </a:r>
-          </a:p>
-        </p:txBody>
-      </p:sp>
-      <p:sp>
-        <p:nvSpPr>
-          <p:cNvPr id="9" name="TextBox 8"/>
-          <p:cNvSpPr txBox="1"/>
-          <p:nvPr/>
-        </p:nvSpPr>
-        <p:spPr>
-          <a:xfrm>
-            <a:off x="960120" y="3493008"/>
-            <a:ext cx="4251960" cy="1206484"/>
-          </a:xfrm>
-          <a:prstGeom prst="rect">
-            <a:avLst/>
-          </a:prstGeom>
-          <a:noFill/>
-        </p:spPr>
-        <p:txBody>
           <a:bodyPr wrap="square" lIns="18288" tIns="18288" rIns="18288" bIns="18288">
             <a:spAutoFit/>
           </a:bodyPr>
           <a:lstStyle/>
           <a:p>
-            <a:pPr>
-              <a:spcAft>
-                <a:spcPts val="1200"/>
-              </a:spcAft>
-            </a:pPr>
-            <a:r>
-              <a:rPr sz="1400" b="1" dirty="0">
-                <a:solidFill>
-                  <a:srgbClr val="F4B53F"/>
-                </a:solidFill>
-                <a:latin typeface="Aptos"/>
-              </a:rPr>
-              <a:t>• </a:t>
-            </a:r>
-            <a:r>
-              <a:rPr sz="1400" b="1" dirty="0">
-                <a:solidFill>
-                  <a:srgbClr val="FFFFFF"/>
-                </a:solidFill>
-                <a:latin typeface="Aptos"/>
-              </a:rPr>
-              <a:t>Rank:</a:t>
-            </a:r>
-            <a:r>
-              <a:rPr sz="1400" dirty="0">
-                <a:solidFill>
-                  <a:srgbClr val="FFFFFF"/>
-                </a:solidFill>
-                <a:latin typeface="Aptos"/>
-              </a:rPr>
-              <a:t> create a risk-ranked list of customers.</a:t>
-            </a:r>
-          </a:p>
-          <a:p>
-            <a:pPr>
-              <a:spcAft>
-                <a:spcPts val="1200"/>
-              </a:spcAft>
-            </a:pPr>
-            <a:r>
-              <a:rPr sz="1400" b="1" dirty="0">
-                <a:solidFill>
-                  <a:srgbClr val="F4B53F"/>
-                </a:solidFill>
-                <a:latin typeface="Aptos"/>
-              </a:rPr>
-              <a:t>• </a:t>
-            </a:r>
-            <a:r>
-              <a:rPr sz="1400" b="1" dirty="0" err="1">
-                <a:solidFill>
-                  <a:srgbClr val="FFFFFF"/>
-                </a:solidFill>
-                <a:latin typeface="Aptos"/>
-              </a:rPr>
-              <a:t>Prioriti</a:t>
-            </a:r>
-            <a:r>
-              <a:rPr lang="en-US" sz="1400" b="1" dirty="0" err="1">
-                <a:solidFill>
-                  <a:srgbClr val="FFFFFF"/>
-                </a:solidFill>
-                <a:latin typeface="Aptos"/>
-              </a:rPr>
-              <a:t>s</a:t>
-            </a:r>
-            <a:r>
-              <a:rPr sz="1400" b="1" dirty="0" err="1">
-                <a:solidFill>
-                  <a:srgbClr val="FFFFFF"/>
-                </a:solidFill>
-                <a:latin typeface="Aptos"/>
-              </a:rPr>
-              <a:t>e</a:t>
-            </a:r>
-            <a:r>
-              <a:rPr sz="1400" b="1" dirty="0">
-                <a:solidFill>
-                  <a:srgbClr val="FFFFFF"/>
-                </a:solidFill>
-                <a:latin typeface="Aptos"/>
-              </a:rPr>
-              <a:t>:</a:t>
-            </a:r>
-            <a:r>
-              <a:rPr sz="1400" dirty="0">
-                <a:solidFill>
-                  <a:srgbClr val="FFFFFF"/>
-                </a:solidFill>
-                <a:latin typeface="Aptos"/>
-              </a:rPr>
-              <a:t> match outreach volume to team capacity.</a:t>
-            </a:r>
-          </a:p>
-          <a:p>
-            <a:pPr>
-              <a:spcAft>
-                <a:spcPts val="1200"/>
-              </a:spcAft>
-            </a:pPr>
-            <a:r>
-              <a:rPr sz="1400" b="1" dirty="0">
-                <a:solidFill>
-                  <a:srgbClr val="F4B53F"/>
-                </a:solidFill>
-                <a:latin typeface="Aptos"/>
-              </a:rPr>
-              <a:t>• </a:t>
-            </a:r>
-            <a:r>
-              <a:rPr sz="1400" b="1" dirty="0">
-                <a:solidFill>
-                  <a:srgbClr val="FFFFFF"/>
-                </a:solidFill>
-                <a:latin typeface="Aptos"/>
-              </a:rPr>
-              <a:t>Test:</a:t>
-            </a:r>
-            <a:r>
-              <a:rPr sz="1400" dirty="0">
-                <a:solidFill>
-                  <a:srgbClr val="FFFFFF"/>
-                </a:solidFill>
-                <a:latin typeface="Aptos"/>
-              </a:rPr>
-              <a:t> run a controlled pilot and measure retention uplift.</a:t>
+            <a:pPr lvl="0"/>
+            <a:r>
+              <a:rPr lang="en-GB" sz="1400" b="1" dirty="0">
+                <a:solidFill>
+                  <a:schemeClr val="bg1"/>
+                </a:solidFill>
+              </a:rPr>
+              <a:t>Prioritise at-risk customers:</a:t>
+            </a:r>
+            <a:r>
+              <a:rPr lang="en-GB" sz="1400" dirty="0">
+                <a:solidFill>
+                  <a:schemeClr val="bg1"/>
+                </a:solidFill>
+              </a:rPr>
+              <a:t> Use the Logistic Regression model to identify customers who are likely to churn and target them with retention offers, personalised support, or contract incentives.</a:t>
+            </a:r>
+          </a:p>
+          <a:p>
+            <a:pPr lvl="0"/>
+            <a:endParaRPr lang="en-GB" sz="1400" dirty="0">
+              <a:solidFill>
+                <a:schemeClr val="bg1"/>
+              </a:solidFill>
+            </a:endParaRPr>
+          </a:p>
+          <a:p>
+            <a:pPr lvl="0"/>
+            <a:r>
+              <a:rPr lang="en-GB" sz="1400" b="1" dirty="0">
+                <a:solidFill>
+                  <a:schemeClr val="bg1"/>
+                </a:solidFill>
+              </a:rPr>
+              <a:t>Focus on customer retention:</a:t>
+            </a:r>
+            <a:r>
+              <a:rPr lang="en-GB" sz="1400" dirty="0">
+                <a:solidFill>
+                  <a:schemeClr val="bg1"/>
+                </a:solidFill>
+              </a:rPr>
+              <a:t> Investigate customers with short-term contracts, limited-service support, or other characteristics associated with churn, and develop targeted strategies to improve their satisfaction and loyalty.</a:t>
+            </a:r>
+          </a:p>
+          <a:p>
+            <a:pPr lvl="0"/>
+            <a:endParaRPr lang="en-GB" sz="1400" dirty="0">
+              <a:solidFill>
+                <a:schemeClr val="bg1"/>
+              </a:solidFill>
+            </a:endParaRPr>
+          </a:p>
+          <a:p>
+            <a:pPr lvl="0"/>
+            <a:r>
+              <a:rPr lang="en-GB" sz="1400" b="1" dirty="0">
+                <a:solidFill>
+                  <a:schemeClr val="bg1"/>
+                </a:solidFill>
+              </a:rPr>
+              <a:t>Monitor model performance:</a:t>
+            </a:r>
+            <a:r>
+              <a:rPr lang="en-GB" sz="1400" dirty="0">
+                <a:solidFill>
+                  <a:schemeClr val="bg1"/>
+                </a:solidFill>
+              </a:rPr>
+              <a:t> Regularly evaluate the model using precision, recall, F1-score, and ROC-AUC. Although Logistic Regression achieved 80.6% accuracy and an ROC-AUC of 84.2%, it still failed to identify some customers who churned.</a:t>
+            </a:r>
+          </a:p>
+          <a:p>
+            <a:pPr lvl="0"/>
+            <a:endParaRPr lang="en-GB" sz="1400" dirty="0">
+              <a:solidFill>
+                <a:schemeClr val="bg1"/>
+              </a:solidFill>
+            </a:endParaRPr>
+          </a:p>
+          <a:p>
+            <a:pPr lvl="0"/>
+            <a:r>
+              <a:rPr lang="en-GB" sz="1400" b="1" dirty="0">
+                <a:solidFill>
+                  <a:schemeClr val="bg1"/>
+                </a:solidFill>
+              </a:rPr>
+              <a:t>Test and improve retention campaigns:</a:t>
+            </a:r>
+            <a:r>
+              <a:rPr lang="en-GB" sz="1400" dirty="0">
+                <a:solidFill>
+                  <a:schemeClr val="bg1"/>
+                </a:solidFill>
+              </a:rPr>
+              <a:t> Run a pilot campaign targeting customers flagged as high risk. Track retention rates, campaign costs, and revenue saved to determine whether the model helps reduce churn and improves the return on investment.</a:t>
             </a:r>
           </a:p>
         </p:txBody>
@@ -8354,14 +8347,14 @@
       </p:sp>
       <p:sp>
         <p:nvSpPr>
-          <p:cNvPr id="13" name="TextBox 12"/>
+          <p:cNvPr id="14" name="TextBox 13"/>
           <p:cNvSpPr txBox="1"/>
           <p:nvPr/>
         </p:nvSpPr>
         <p:spPr>
           <a:xfrm>
-            <a:off x="6720840" y="2139696"/>
-            <a:ext cx="1371600" cy="274320"/>
+            <a:off x="7075087" y="2182164"/>
+            <a:ext cx="3200400" cy="443198"/>
           </a:xfrm>
           <a:prstGeom prst="rect">
             <a:avLst/>
@@ -8374,59 +8367,16 @@
           </a:bodyPr>
           <a:lstStyle/>
           <a:p>
-            <a:pPr algn="l">
-              <a:spcAft>
-                <a:spcPts val="0"/>
-              </a:spcAft>
-            </a:pPr>
-            <a:r>
-              <a:rPr sz="1400" b="1" i="0">
-                <a:solidFill>
-                  <a:srgbClr val="13233D"/>
-                </a:solidFill>
-                <a:latin typeface="Aptos"/>
-              </a:rPr>
-              <a:t>Validate</a:t>
-            </a:r>
-          </a:p>
-        </p:txBody>
-      </p:sp>
-      <p:sp>
-        <p:nvSpPr>
-          <p:cNvPr id="14" name="TextBox 13"/>
-          <p:cNvSpPr txBox="1"/>
-          <p:nvPr/>
-        </p:nvSpPr>
-        <p:spPr>
-          <a:xfrm>
-            <a:off x="8046720" y="2139696"/>
-            <a:ext cx="3154680" cy="530352"/>
-          </a:xfrm>
-          <a:prstGeom prst="rect">
-            <a:avLst/>
-          </a:prstGeom>
-          <a:noFill/>
-        </p:spPr>
-        <p:txBody>
-          <a:bodyPr wrap="square" lIns="36576" tIns="36576" rIns="36576" bIns="36576" anchor="t">
-            <a:spAutoFit/>
-          </a:bodyPr>
-          <a:lstStyle/>
-          <a:p>
-            <a:pPr algn="l">
-              <a:spcAft>
-                <a:spcPts val="0"/>
-              </a:spcAft>
-            </a:pPr>
-            <a:r>
-              <a:rPr sz="1100" b="0" i="0">
-                <a:solidFill>
-                  <a:srgbClr val="2C3849"/>
-                </a:solidFill>
-                <a:latin typeface="Aptos"/>
-              </a:rPr>
-              <a:t>Confirm data-quality counts and rerun all models consistently.</a:t>
-            </a:r>
+            <a:r>
+              <a:rPr lang="en-GB" sz="1200" dirty="0"/>
+              <a:t>Fine-tune the Logistic Regression model to improve churn prediction.</a:t>
+            </a:r>
+            <a:endParaRPr sz="1200" b="0" i="0" dirty="0">
+              <a:solidFill>
+                <a:srgbClr val="2C3849"/>
+              </a:solidFill>
+              <a:latin typeface="Aptos"/>
+            </a:endParaRPr>
           </a:p>
         </p:txBody>
       </p:sp>
@@ -8517,14 +8467,14 @@
       </p:sp>
       <p:sp>
         <p:nvSpPr>
-          <p:cNvPr id="17" name="TextBox 16"/>
+          <p:cNvPr id="18" name="TextBox 17"/>
           <p:cNvSpPr txBox="1"/>
           <p:nvPr/>
         </p:nvSpPr>
         <p:spPr>
           <a:xfrm>
-            <a:off x="6720840" y="2999232"/>
-            <a:ext cx="1371600" cy="274320"/>
+            <a:off x="7075087" y="3015807"/>
+            <a:ext cx="3154680" cy="443198"/>
           </a:xfrm>
           <a:prstGeom prst="rect">
             <a:avLst/>
@@ -8537,77 +8487,16 @@
           </a:bodyPr>
           <a:lstStyle/>
           <a:p>
-            <a:pPr algn="l">
-              <a:spcAft>
-                <a:spcPts val="0"/>
-              </a:spcAft>
-            </a:pPr>
-            <a:r>
-              <a:rPr sz="1400" b="1" i="0">
-                <a:solidFill>
-                  <a:srgbClr val="13233D"/>
-                </a:solidFill>
-                <a:latin typeface="Aptos"/>
-              </a:rPr>
-              <a:t>Improve</a:t>
-            </a:r>
-          </a:p>
-        </p:txBody>
-      </p:sp>
-      <p:sp>
-        <p:nvSpPr>
-          <p:cNvPr id="18" name="TextBox 17"/>
-          <p:cNvSpPr txBox="1"/>
-          <p:nvPr/>
-        </p:nvSpPr>
-        <p:spPr>
-          <a:xfrm>
-            <a:off x="8046720" y="2999232"/>
-            <a:ext cx="3154680" cy="412421"/>
-          </a:xfrm>
-          <a:prstGeom prst="rect">
-            <a:avLst/>
-          </a:prstGeom>
-          <a:noFill/>
-        </p:spPr>
-        <p:txBody>
-          <a:bodyPr wrap="square" lIns="36576" tIns="36576" rIns="36576" bIns="36576" anchor="t">
-            <a:spAutoFit/>
-          </a:bodyPr>
-          <a:lstStyle/>
-          <a:p>
-            <a:pPr algn="l">
-              <a:spcAft>
-                <a:spcPts val="0"/>
-              </a:spcAft>
-            </a:pPr>
-            <a:r>
-              <a:rPr lang="en-US" sz="1100" b="0" i="0" dirty="0">
-                <a:solidFill>
-                  <a:srgbClr val="2C3849"/>
-                </a:solidFill>
-                <a:latin typeface="Aptos"/>
-              </a:rPr>
-              <a:t>Use other features including numerical features and </a:t>
-            </a:r>
-            <a:r>
-              <a:rPr lang="en-US" sz="1100" dirty="0">
-                <a:solidFill>
-                  <a:srgbClr val="2C3849"/>
-                </a:solidFill>
-                <a:latin typeface="Aptos"/>
-              </a:rPr>
-              <a:t>t</a:t>
-            </a:r>
-            <a:r>
-              <a:rPr sz="1100" b="0" i="0" dirty="0">
-                <a:solidFill>
-                  <a:srgbClr val="2C3849"/>
-                </a:solidFill>
-                <a:latin typeface="Aptos"/>
-              </a:rPr>
-              <a:t>une with cross-validation</a:t>
-            </a:r>
+            <a:r>
+              <a:rPr lang="en-GB" sz="1200"/>
+              <a:t>Adjust the prediction threshold to identify more at-risk customers.</a:t>
+            </a:r>
+            <a:endParaRPr sz="1200" b="0" i="0" dirty="0">
+              <a:solidFill>
+                <a:srgbClr val="2C3849"/>
+              </a:solidFill>
+              <a:latin typeface="Aptos"/>
+            </a:endParaRPr>
           </a:p>
         </p:txBody>
       </p:sp>
@@ -8698,14 +8587,14 @@
       </p:sp>
       <p:sp>
         <p:nvSpPr>
-          <p:cNvPr id="21" name="TextBox 20"/>
+          <p:cNvPr id="22" name="TextBox 21"/>
           <p:cNvSpPr txBox="1"/>
           <p:nvPr/>
         </p:nvSpPr>
         <p:spPr>
           <a:xfrm>
-            <a:off x="6720840" y="3858768"/>
-            <a:ext cx="1371600" cy="274320"/>
+            <a:off x="7075087" y="3827177"/>
+            <a:ext cx="3154680" cy="443198"/>
           </a:xfrm>
           <a:prstGeom prst="rect">
             <a:avLst/>
@@ -8718,59 +8607,16 @@
           </a:bodyPr>
           <a:lstStyle/>
           <a:p>
-            <a:pPr algn="l">
-              <a:spcAft>
-                <a:spcPts val="0"/>
-              </a:spcAft>
-            </a:pPr>
-            <a:r>
-              <a:rPr sz="1400" b="1" i="0">
-                <a:solidFill>
-                  <a:srgbClr val="13233D"/>
-                </a:solidFill>
-                <a:latin typeface="Aptos"/>
-              </a:rPr>
-              <a:t>Calibrate</a:t>
-            </a:r>
-          </a:p>
-        </p:txBody>
-      </p:sp>
-      <p:sp>
-        <p:nvSpPr>
-          <p:cNvPr id="22" name="TextBox 21"/>
-          <p:cNvSpPr txBox="1"/>
-          <p:nvPr/>
-        </p:nvSpPr>
-        <p:spPr>
-          <a:xfrm>
-            <a:off x="8046720" y="3858768"/>
-            <a:ext cx="3154680" cy="530352"/>
-          </a:xfrm>
-          <a:prstGeom prst="rect">
-            <a:avLst/>
-          </a:prstGeom>
-          <a:noFill/>
-        </p:spPr>
-        <p:txBody>
-          <a:bodyPr wrap="square" lIns="36576" tIns="36576" rIns="36576" bIns="36576" anchor="t">
-            <a:spAutoFit/>
-          </a:bodyPr>
-          <a:lstStyle/>
-          <a:p>
-            <a:pPr algn="l">
-              <a:spcAft>
-                <a:spcPts val="0"/>
-              </a:spcAft>
-            </a:pPr>
-            <a:r>
-              <a:rPr sz="1100" b="0" i="0" dirty="0">
-                <a:solidFill>
-                  <a:srgbClr val="2C3849"/>
-                </a:solidFill>
-                <a:latin typeface="Aptos"/>
-              </a:rPr>
-              <a:t>Choose a threshold using validation data and retention capacity.</a:t>
-            </a:r>
+            <a:r>
+              <a:rPr lang="en-GB" sz="1200" dirty="0"/>
+              <a:t>Run a pilot retention campaign targeting customers predicted to churn.</a:t>
+            </a:r>
+            <a:endParaRPr sz="1200" b="0" i="0" dirty="0">
+              <a:solidFill>
+                <a:srgbClr val="2C3849"/>
+              </a:solidFill>
+              <a:latin typeface="Aptos"/>
+            </a:endParaRPr>
           </a:p>
         </p:txBody>
       </p:sp>
@@ -8861,14 +8707,14 @@
       </p:sp>
       <p:sp>
         <p:nvSpPr>
-          <p:cNvPr id="25" name="TextBox 24"/>
+          <p:cNvPr id="26" name="TextBox 25"/>
           <p:cNvSpPr txBox="1"/>
           <p:nvPr/>
         </p:nvSpPr>
         <p:spPr>
           <a:xfrm>
-            <a:off x="6720840" y="4718304"/>
-            <a:ext cx="1371600" cy="274320"/>
+            <a:off x="7075087" y="4709837"/>
+            <a:ext cx="3154680" cy="443198"/>
           </a:xfrm>
           <a:prstGeom prst="rect">
             <a:avLst/>
@@ -8881,59 +8727,16 @@
           </a:bodyPr>
           <a:lstStyle/>
           <a:p>
-            <a:pPr algn="l">
-              <a:spcAft>
-                <a:spcPts val="0"/>
-              </a:spcAft>
-            </a:pPr>
-            <a:r>
-              <a:rPr sz="1400" b="1" i="0">
-                <a:solidFill>
-                  <a:srgbClr val="13233D"/>
-                </a:solidFill>
-                <a:latin typeface="Aptos"/>
-              </a:rPr>
-              <a:t>Prove value</a:t>
-            </a:r>
-          </a:p>
-        </p:txBody>
-      </p:sp>
-      <p:sp>
-        <p:nvSpPr>
-          <p:cNvPr id="26" name="TextBox 25"/>
-          <p:cNvSpPr txBox="1"/>
-          <p:nvPr/>
-        </p:nvSpPr>
-        <p:spPr>
-          <a:xfrm>
-            <a:off x="8046720" y="4718304"/>
-            <a:ext cx="3154680" cy="530352"/>
-          </a:xfrm>
-          <a:prstGeom prst="rect">
-            <a:avLst/>
-          </a:prstGeom>
-          <a:noFill/>
-        </p:spPr>
-        <p:txBody>
-          <a:bodyPr wrap="square" lIns="36576" tIns="36576" rIns="36576" bIns="36576" anchor="t">
-            <a:spAutoFit/>
-          </a:bodyPr>
-          <a:lstStyle/>
-          <a:p>
-            <a:pPr algn="l">
-              <a:spcAft>
-                <a:spcPts val="0"/>
-              </a:spcAft>
-            </a:pPr>
-            <a:r>
-              <a:rPr sz="1100" b="0" i="0" dirty="0">
-                <a:solidFill>
-                  <a:srgbClr val="2C3849"/>
-                </a:solidFill>
-                <a:latin typeface="Aptos"/>
-              </a:rPr>
-              <a:t>Measure contact cost, saved customers, uplift and ROI in a pilot.</a:t>
-            </a:r>
+            <a:r>
+              <a:rPr lang="en-GB" sz="1200"/>
+              <a:t>Monitor churn rates, retention costs, and revenue saved to measure business impact.</a:t>
+            </a:r>
+            <a:endParaRPr sz="1200" b="0" i="0" dirty="0">
+              <a:solidFill>
+                <a:srgbClr val="2C3849"/>
+              </a:solidFill>
+              <a:latin typeface="Aptos"/>
+            </a:endParaRPr>
           </a:p>
         </p:txBody>
       </p:sp>
@@ -8995,8 +8798,8 @@
         </p:nvSpPr>
         <p:spPr>
           <a:xfrm>
-            <a:off x="6291072" y="5664237"/>
-            <a:ext cx="4800600" cy="412421"/>
+            <a:off x="6203696" y="5528915"/>
+            <a:ext cx="4800600" cy="627864"/>
           </a:xfrm>
           <a:prstGeom prst="rect">
             <a:avLst/>
@@ -9015,53 +8818,19 @@
               </a:spcAft>
             </a:pPr>
             <a:r>
-              <a:rPr sz="1100" b="1" i="0" dirty="0">
-                <a:solidFill>
-                  <a:srgbClr val="13233D"/>
-                </a:solidFill>
-                <a:latin typeface="Aptos"/>
-              </a:rPr>
-              <a:t>Key risks: missed churners, unnecessary offers, data drift and unproven intervention impact.</a:t>
-            </a:r>
-          </a:p>
-        </p:txBody>
-      </p:sp>
-      <p:sp>
-        <p:nvSpPr>
-          <p:cNvPr id="29" name="TextBox 28"/>
-          <p:cNvSpPr txBox="1"/>
-          <p:nvPr/>
-        </p:nvSpPr>
-        <p:spPr>
-          <a:xfrm>
-            <a:off x="685800" y="6199632"/>
-            <a:ext cx="10881360" cy="219456"/>
-          </a:xfrm>
-          <a:prstGeom prst="rect">
-            <a:avLst/>
-          </a:prstGeom>
-          <a:noFill/>
-        </p:spPr>
-        <p:txBody>
-          <a:bodyPr wrap="square" lIns="36576" tIns="36576" rIns="36576" bIns="36576" anchor="t">
-            <a:spAutoFit/>
-          </a:bodyPr>
-          <a:lstStyle/>
-          <a:p>
-            <a:pPr algn="l">
-              <a:spcAft>
-                <a:spcPts val="0"/>
-              </a:spcAft>
-            </a:pPr>
-            <a:r>
-              <a:rPr sz="1100" b="1" i="0" dirty="0">
-                <a:solidFill>
-                  <a:srgbClr val="009999"/>
-                </a:solidFill>
-                <a:latin typeface="Aptos"/>
-              </a:rPr>
-              <a:t>Success is not just predictive accuracy: it is measurable, cost-effective reduction in churn.</a:t>
-            </a:r>
+              <a:rPr lang="en-GB" sz="1200" b="1"/>
+              <a:t>Risk:</a:t>
+            </a:r>
+            <a:r>
+              <a:rPr lang="en-GB" sz="1200"/>
+              <a:t> The model may incorrectly classify customers, leading to missed churners or wasted retention spending; its predictions should be validated through real-world testing.</a:t>
+            </a:r>
+            <a:endParaRPr sz="1200" b="1" i="0" dirty="0">
+              <a:solidFill>
+                <a:srgbClr val="13233D"/>
+              </a:solidFill>
+              <a:latin typeface="Aptos"/>
+            </a:endParaRPr>
           </a:p>
         </p:txBody>
       </p:sp>
